--- a/talk/optimizations-in-sparse-coding/OSC.pptx
+++ b/talk/optimizations-in-sparse-coding/OSC.pptx
@@ -9340,7 +9340,15 @@
           <a:p>
             <a:r>
               <a:rPr lang="en-US" sz="2000" dirty="0"/>
-              <a:t>Issue- L1 norm cannot is not differentiable at h=0</a:t>
+              <a:t>Issue- L1 </a:t>
+            </a:r>
+            <a:r>
+              <a:rPr lang="en-US" sz="2000"/>
+              <a:t>norm is </a:t>
+            </a:r>
+            <a:r>
+              <a:rPr lang="en-US" sz="2000" dirty="0"/>
+              <a:t>not differentiable at h=0</a:t>
             </a:r>
           </a:p>
           <a:p>
